--- a/templates/feature/feature_3card_A.pptx
+++ b/templates/feature/feature_3card_A.pptx
@@ -3098,45 +3098,40 @@
       <p:grpSpPr/>
       <p:sp>
         <p:nvSpPr>
-          <p:cNvPr id="2" name="Rectangle 1"/>
-          <p:cNvSpPr/>
+          <p:cNvPr id="2" name="TextBox 1"/>
+          <p:cNvSpPr txBox="1"/>
           <p:nvPr/>
         </p:nvSpPr>
         <p:spPr>
           <a:xfrm>
-            <a:off x="0" y="0"/>
-            <a:ext cx="7560000" cy="720000"/>
+            <a:off x="432000" y="324000"/>
+            <a:ext cx="6696000" cy="396000"/>
           </a:xfrm>
           <a:prstGeom prst="rect">
             <a:avLst/>
           </a:prstGeom>
-          <a:solidFill>
-            <a:srgbClr val="122242"/>
-          </a:solidFill>
-          <a:ln>
-            <a:noFill/>
-          </a:ln>
-          <a:effectLst/>
+          <a:noFill/>
         </p:spPr>
-        <p:style>
-          <a:lnRef idx="1">
-            <a:schemeClr val="accent1"/>
-          </a:lnRef>
-          <a:fillRef idx="3">
-            <a:schemeClr val="accent1"/>
-          </a:fillRef>
-          <a:effectRef idx="2">
-            <a:schemeClr val="accent1"/>
-          </a:effectRef>
-          <a:fontRef idx="minor">
-            <a:schemeClr val="lt1"/>
-          </a:fontRef>
-        </p:style>
-        <p:txBody>
-          <a:bodyPr rtlCol="0" anchor="ctr"/>
-          <a:lstStyle/>
-          <a:p>
-            <a:pPr algn="ctr"/>
+        <p:txBody>
+          <a:bodyPr wrap="square" anchor="t" lIns="0" rIns="0" tIns="0" bIns="0">
+            <a:spAutoFit/>
+          </a:bodyPr>
+          <a:lstStyle/>
+          <a:p>
+            <a:pPr algn="l">
+              <a:lnSpc>
+                <a:spcPct val="115000"/>
+              </a:lnSpc>
+            </a:pPr>
+            <a:r>
+              <a:rPr sz="1900" b="1">
+                <a:solidFill>
+                  <a:srgbClr val="122242"/>
+                </a:solidFill>
+                <a:latin typeface="맑은 고딕"/>
+              </a:rPr>
+              <a:t>{{PAGE_TITLE}}</a:t>
+            </a:r>
           </a:p>
         </p:txBody>
       </p:sp>
@@ -3148,8 +3143,8 @@
         </p:nvSpPr>
         <p:spPr>
           <a:xfrm>
-            <a:off x="0" y="720000"/>
-            <a:ext cx="7560000" cy="27940"/>
+            <a:off x="432000" y="738000"/>
+            <a:ext cx="504000" cy="30480"/>
           </a:xfrm>
           <a:prstGeom prst="rect">
             <a:avLst/>
@@ -3184,108 +3179,30 @@
           </a:p>
         </p:txBody>
       </p:sp>
-      <p:sp>
-        <p:nvSpPr>
-          <p:cNvPr id="4" name="TextBox 3"/>
-          <p:cNvSpPr txBox="1"/>
-          <p:nvPr/>
-        </p:nvSpPr>
-        <p:spPr>
-          <a:xfrm>
-            <a:off x="432000" y="126000"/>
-            <a:ext cx="6696000" cy="468000"/>
-          </a:xfrm>
-          <a:prstGeom prst="rect">
-            <a:avLst/>
-          </a:prstGeom>
-          <a:noFill/>
-        </p:spPr>
-        <p:txBody>
-          <a:bodyPr wrap="square" anchor="ctr" lIns="0" rIns="0" tIns="0" bIns="0">
-            <a:spAutoFit/>
-          </a:bodyPr>
-          <a:lstStyle/>
-          <a:p>
-            <a:pPr algn="l">
-              <a:lnSpc>
-                <a:spcPct val="115000"/>
-              </a:lnSpc>
-            </a:pPr>
-            <a:r>
-              <a:rPr sz="2200" b="1">
-                <a:solidFill>
-                  <a:srgbClr val="FFFFFF"/>
-                </a:solidFill>
-                <a:latin typeface="맑은 고딕"/>
-              </a:rPr>
-              <a:t>{{PAGE_TITLE}}</a:t>
-            </a:r>
-          </a:p>
-        </p:txBody>
-      </p:sp>
-      <p:sp>
-        <p:nvSpPr>
-          <p:cNvPr id="5" name="TextBox 4"/>
-          <p:cNvSpPr txBox="1"/>
-          <p:nvPr/>
-        </p:nvSpPr>
-        <p:spPr>
-          <a:xfrm>
-            <a:off x="6480000" y="10260000"/>
-            <a:ext cx="720000" cy="288000"/>
-          </a:xfrm>
-          <a:prstGeom prst="rect">
-            <a:avLst/>
-          </a:prstGeom>
-          <a:noFill/>
-        </p:spPr>
-        <p:txBody>
-          <a:bodyPr wrap="square" anchor="t" lIns="0" rIns="0" tIns="0" bIns="0">
-            <a:spAutoFit/>
-          </a:bodyPr>
-          <a:lstStyle/>
-          <a:p>
-            <a:pPr algn="r">
-              <a:lnSpc>
-                <a:spcPct val="115000"/>
-              </a:lnSpc>
-            </a:pPr>
-            <a:r>
-              <a:rPr sz="900" b="0">
-                <a:solidFill>
-                  <a:srgbClr val="969BA5"/>
-                </a:solidFill>
-                <a:latin typeface="맑은 고딕"/>
-              </a:rPr>
-              <a:t>02</a:t>
-            </a:r>
-          </a:p>
-        </p:txBody>
-      </p:sp>
       <p:grpSp>
         <p:nvGrpSpPr>
-          <p:cNvPr id="11" name="GROUP_CARD_1"/>
+          <p:cNvPr id="8" name="GROUP_CARD_1"/>
           <p:cNvGrpSpPr/>
           <p:nvPr/>
         </p:nvGrpSpPr>
         <p:grpSpPr>
           <a:xfrm>
-            <a:off x="432000" y="972000"/>
-            <a:ext cx="2088000" cy="9288000"/>
-            <a:chOff x="432000" y="972000"/>
-            <a:chExt cx="2088000" cy="9288000"/>
+            <a:off x="432000" y="900000"/>
+            <a:ext cx="2088000" cy="7776000"/>
+            <a:chOff x="432000" y="900000"/>
+            <a:chExt cx="2088000" cy="7776000"/>
           </a:xfrm>
         </p:grpSpPr>
         <p:sp>
           <p:nvSpPr>
-            <p:cNvPr id="6" name="Rectangle 5"/>
+            <p:cNvPr id="4" name="PHOTO_1"/>
             <p:cNvSpPr/>
             <p:nvPr/>
           </p:nvSpPr>
           <p:spPr>
             <a:xfrm>
-              <a:off x="432000" y="972000"/>
-              <a:ext cx="2088000" cy="9288000"/>
+              <a:off x="432000" y="900000"/>
+              <a:ext cx="2088000" cy="5400000"/>
             </a:xfrm>
             <a:prstGeom prst="rect">
               <a:avLst/>
@@ -3322,14 +3239,14 @@
         </p:sp>
         <p:sp>
           <p:nvSpPr>
-            <p:cNvPr id="7" name="Rectangle 6"/>
+            <p:cNvPr id="5" name="Rectangle 4"/>
             <p:cNvSpPr/>
             <p:nvPr/>
           </p:nvSpPr>
           <p:spPr>
             <a:xfrm>
-              <a:off x="432000" y="972000"/>
-              <a:ext cx="2088000" cy="72000"/>
+              <a:off x="432000" y="6516000"/>
+              <a:ext cx="360000" cy="17780"/>
             </a:xfrm>
             <a:prstGeom prst="rect">
               <a:avLst/>
@@ -3366,14 +3283,107 @@
         </p:sp>
         <p:sp>
           <p:nvSpPr>
-            <p:cNvPr id="8" name="PHOTO_1"/>
+            <p:cNvPr id="6" name="TextBox 5"/>
+            <p:cNvSpPr txBox="1"/>
+            <p:nvPr/>
+          </p:nvSpPr>
+          <p:spPr>
+            <a:xfrm>
+              <a:off x="432000" y="6660000"/>
+              <a:ext cx="2088000" cy="324000"/>
+            </a:xfrm>
+            <a:prstGeom prst="rect">
+              <a:avLst/>
+            </a:prstGeom>
+            <a:noFill/>
+          </p:spPr>
+          <p:txBody>
+            <a:bodyPr wrap="square" anchor="t" lIns="0" rIns="0" tIns="0" bIns="0">
+              <a:spAutoFit/>
+            </a:bodyPr>
+            <a:lstStyle/>
+            <a:p>
+              <a:pPr algn="l">
+                <a:lnSpc>
+                  <a:spcPct val="115000"/>
+                </a:lnSpc>
+              </a:pPr>
+              <a:r>
+                <a:rPr sz="1500" b="1">
+                  <a:solidFill>
+                    <a:srgbClr val="B08D57"/>
+                  </a:solidFill>
+                  <a:latin typeface="맑은 고딕"/>
+                </a:rPr>
+                <a:t>{{TITLE_1}}</a:t>
+              </a:r>
+            </a:p>
+          </p:txBody>
+        </p:sp>
+        <p:sp>
+          <p:nvSpPr>
+            <p:cNvPr id="7" name="TextBox 6"/>
+            <p:cNvSpPr txBox="1"/>
+            <p:nvPr/>
+          </p:nvSpPr>
+          <p:spPr>
+            <a:xfrm>
+              <a:off x="432000" y="7020000"/>
+              <a:ext cx="2088000" cy="1656000"/>
+            </a:xfrm>
+            <a:prstGeom prst="rect">
+              <a:avLst/>
+            </a:prstGeom>
+            <a:noFill/>
+          </p:spPr>
+          <p:txBody>
+            <a:bodyPr wrap="square" anchor="t" lIns="0" rIns="0" tIns="0" bIns="0">
+              <a:spAutoFit/>
+            </a:bodyPr>
+            <a:lstStyle/>
+            <a:p>
+              <a:pPr algn="l">
+                <a:lnSpc>
+                  <a:spcPct val="115000"/>
+                </a:lnSpc>
+              </a:pPr>
+              <a:r>
+                <a:rPr sz="1100" b="0">
+                  <a:solidFill>
+                    <a:srgbClr val="373C46"/>
+                  </a:solidFill>
+                  <a:latin typeface="맑은 고딕"/>
+                </a:rPr>
+                <a:t>{{DESC_1}}</a:t>
+              </a:r>
+            </a:p>
+          </p:txBody>
+        </p:sp>
+      </p:grpSp>
+      <p:grpSp>
+        <p:nvGrpSpPr>
+          <p:cNvPr id="13" name="GROUP_CARD_2"/>
+          <p:cNvGrpSpPr/>
+          <p:nvPr/>
+        </p:nvGrpSpPr>
+        <p:grpSpPr>
+          <a:xfrm>
+            <a:off x="2736000" y="900000"/>
+            <a:ext cx="2088000" cy="7776000"/>
+            <a:chOff x="2736000" y="900000"/>
+            <a:chExt cx="2088000" cy="7776000"/>
+          </a:xfrm>
+        </p:grpSpPr>
+        <p:sp>
+          <p:nvSpPr>
+            <p:cNvPr id="9" name="PHOTO_2"/>
             <p:cNvSpPr/>
             <p:nvPr/>
           </p:nvSpPr>
           <p:spPr>
             <a:xfrm>
-              <a:off x="576000" y="1116000"/>
-              <a:ext cx="1800000" cy="7920000"/>
+              <a:off x="2736000" y="900000"/>
+              <a:ext cx="2088000" cy="5400000"/>
             </a:xfrm>
             <a:prstGeom prst="rect">
               <a:avLst/>
@@ -3410,14 +3420,58 @@
         </p:sp>
         <p:sp>
           <p:nvSpPr>
-            <p:cNvPr id="9" name="TextBox 8"/>
+            <p:cNvPr id="10" name="Rectangle 9"/>
+            <p:cNvSpPr/>
+            <p:nvPr/>
+          </p:nvSpPr>
+          <p:spPr>
+            <a:xfrm>
+              <a:off x="2736000" y="6516000"/>
+              <a:ext cx="360000" cy="17780"/>
+            </a:xfrm>
+            <a:prstGeom prst="rect">
+              <a:avLst/>
+            </a:prstGeom>
+            <a:solidFill>
+              <a:srgbClr val="B08D57"/>
+            </a:solidFill>
+            <a:ln>
+              <a:noFill/>
+            </a:ln>
+            <a:effectLst/>
+          </p:spPr>
+          <p:style>
+            <a:lnRef idx="1">
+              <a:schemeClr val="accent1"/>
+            </a:lnRef>
+            <a:fillRef idx="3">
+              <a:schemeClr val="accent1"/>
+            </a:fillRef>
+            <a:effectRef idx="2">
+              <a:schemeClr val="accent1"/>
+            </a:effectRef>
+            <a:fontRef idx="minor">
+              <a:schemeClr val="lt1"/>
+            </a:fontRef>
+          </p:style>
+          <p:txBody>
+            <a:bodyPr rtlCol="0" anchor="ctr"/>
+            <a:lstStyle/>
+            <a:p>
+              <a:pPr algn="ctr"/>
+            </a:p>
+          </p:txBody>
+        </p:sp>
+        <p:sp>
+          <p:nvSpPr>
+            <p:cNvPr id="11" name="TextBox 10"/>
             <p:cNvSpPr txBox="1"/>
             <p:nvPr/>
           </p:nvSpPr>
           <p:spPr>
             <a:xfrm>
-              <a:off x="576000" y="9036000"/>
-              <a:ext cx="1800000" cy="504000"/>
+              <a:off x="2736000" y="6660000"/>
+              <a:ext cx="2088000" cy="324000"/>
             </a:xfrm>
             <a:prstGeom prst="rect">
               <a:avLst/>
@@ -3442,21 +3496,21 @@
                   </a:solidFill>
                   <a:latin typeface="맑은 고딕"/>
                 </a:rPr>
-                <a:t>{{TITLE_1}}</a:t>
+                <a:t>{{TITLE_2}}</a:t>
               </a:r>
             </a:p>
           </p:txBody>
         </p:sp>
         <p:sp>
           <p:nvSpPr>
-            <p:cNvPr id="10" name="TextBox 9"/>
+            <p:cNvPr id="12" name="TextBox 11"/>
             <p:cNvSpPr txBox="1"/>
             <p:nvPr/>
           </p:nvSpPr>
           <p:spPr>
             <a:xfrm>
-              <a:off x="576000" y="9540000"/>
-              <a:ext cx="1800000" cy="576000"/>
+              <a:off x="2736000" y="7020000"/>
+              <a:ext cx="2088000" cy="1656000"/>
             </a:xfrm>
             <a:prstGeom prst="rect">
               <a:avLst/>
@@ -3477,11 +3531,11 @@
               <a:r>
                 <a:rPr sz="1100" b="0">
                   <a:solidFill>
-                    <a:srgbClr val="6E737D"/>
+                    <a:srgbClr val="373C46"/>
                   </a:solidFill>
                   <a:latin typeface="맑은 고딕"/>
                 </a:rPr>
-                <a:t>{{DESC_1}}</a:t>
+                <a:t>{{DESC_2}}</a:t>
               </a:r>
             </a:p>
           </p:txBody>
@@ -3489,28 +3543,28 @@
       </p:grpSp>
       <p:grpSp>
         <p:nvGrpSpPr>
-          <p:cNvPr id="17" name="GROUP_CARD_2"/>
+          <p:cNvPr id="18" name="GROUP_CARD_3"/>
           <p:cNvGrpSpPr/>
           <p:nvPr/>
         </p:nvGrpSpPr>
         <p:grpSpPr>
           <a:xfrm>
-            <a:off x="2736000" y="972000"/>
-            <a:ext cx="2088000" cy="9288000"/>
-            <a:chOff x="2736000" y="972000"/>
-            <a:chExt cx="2088000" cy="9288000"/>
+            <a:off x="5040000" y="900000"/>
+            <a:ext cx="2088000" cy="7776000"/>
+            <a:chOff x="5040000" y="900000"/>
+            <a:chExt cx="2088000" cy="7776000"/>
           </a:xfrm>
         </p:grpSpPr>
         <p:sp>
           <p:nvSpPr>
-            <p:cNvPr id="12" name="Rectangle 11"/>
+            <p:cNvPr id="14" name="PHOTO_3"/>
             <p:cNvSpPr/>
             <p:nvPr/>
           </p:nvSpPr>
           <p:spPr>
             <a:xfrm>
-              <a:off x="2736000" y="972000"/>
-              <a:ext cx="2088000" cy="9288000"/>
+              <a:off x="5040000" y="900000"/>
+              <a:ext cx="2088000" cy="5400000"/>
             </a:xfrm>
             <a:prstGeom prst="rect">
               <a:avLst/>
@@ -3547,14 +3601,14 @@
         </p:sp>
         <p:sp>
           <p:nvSpPr>
-            <p:cNvPr id="13" name="Rectangle 12"/>
+            <p:cNvPr id="15" name="Rectangle 14"/>
             <p:cNvSpPr/>
             <p:nvPr/>
           </p:nvSpPr>
           <p:spPr>
             <a:xfrm>
-              <a:off x="2736000" y="972000"/>
-              <a:ext cx="2088000" cy="72000"/>
+              <a:off x="5040000" y="6516000"/>
+              <a:ext cx="360000" cy="17780"/>
             </a:xfrm>
             <a:prstGeom prst="rect">
               <a:avLst/>
@@ -3591,283 +3645,14 @@
         </p:sp>
         <p:sp>
           <p:nvSpPr>
-            <p:cNvPr id="14" name="PHOTO_2"/>
-            <p:cNvSpPr/>
-            <p:nvPr/>
-          </p:nvSpPr>
-          <p:spPr>
-            <a:xfrm>
-              <a:off x="2880000" y="1116000"/>
-              <a:ext cx="1800000" cy="7920000"/>
-            </a:xfrm>
-            <a:prstGeom prst="rect">
-              <a:avLst/>
-            </a:prstGeom>
-            <a:solidFill>
-              <a:srgbClr val="F1F2F5"/>
-            </a:solidFill>
-            <a:ln>
-              <a:noFill/>
-            </a:ln>
-            <a:effectLst/>
-          </p:spPr>
-          <p:style>
-            <a:lnRef idx="1">
-              <a:schemeClr val="accent1"/>
-            </a:lnRef>
-            <a:fillRef idx="3">
-              <a:schemeClr val="accent1"/>
-            </a:fillRef>
-            <a:effectRef idx="2">
-              <a:schemeClr val="accent1"/>
-            </a:effectRef>
-            <a:fontRef idx="minor">
-              <a:schemeClr val="lt1"/>
-            </a:fontRef>
-          </p:style>
-          <p:txBody>
-            <a:bodyPr rtlCol="0" anchor="ctr"/>
-            <a:lstStyle/>
-            <a:p>
-              <a:pPr algn="ctr"/>
-            </a:p>
-          </p:txBody>
-        </p:sp>
-        <p:sp>
-          <p:nvSpPr>
-            <p:cNvPr id="15" name="TextBox 14"/>
-            <p:cNvSpPr txBox="1"/>
-            <p:nvPr/>
-          </p:nvSpPr>
-          <p:spPr>
-            <a:xfrm>
-              <a:off x="2880000" y="9036000"/>
-              <a:ext cx="1800000" cy="504000"/>
-            </a:xfrm>
-            <a:prstGeom prst="rect">
-              <a:avLst/>
-            </a:prstGeom>
-            <a:noFill/>
-          </p:spPr>
-          <p:txBody>
-            <a:bodyPr wrap="square" anchor="t" lIns="0" rIns="0" tIns="0" bIns="0">
-              <a:spAutoFit/>
-            </a:bodyPr>
-            <a:lstStyle/>
-            <a:p>
-              <a:pPr algn="l">
-                <a:lnSpc>
-                  <a:spcPct val="115000"/>
-                </a:lnSpc>
-              </a:pPr>
-              <a:r>
-                <a:rPr sz="1500" b="1">
-                  <a:solidFill>
-                    <a:srgbClr val="B08D57"/>
-                  </a:solidFill>
-                  <a:latin typeface="맑은 고딕"/>
-                </a:rPr>
-                <a:t>{{TITLE_2}}</a:t>
-              </a:r>
-            </a:p>
-          </p:txBody>
-        </p:sp>
-        <p:sp>
-          <p:nvSpPr>
             <p:cNvPr id="16" name="TextBox 15"/>
             <p:cNvSpPr txBox="1"/>
             <p:nvPr/>
           </p:nvSpPr>
           <p:spPr>
             <a:xfrm>
-              <a:off x="2880000" y="9540000"/>
-              <a:ext cx="1800000" cy="576000"/>
-            </a:xfrm>
-            <a:prstGeom prst="rect">
-              <a:avLst/>
-            </a:prstGeom>
-            <a:noFill/>
-          </p:spPr>
-          <p:txBody>
-            <a:bodyPr wrap="square" anchor="t" lIns="0" rIns="0" tIns="0" bIns="0">
-              <a:spAutoFit/>
-            </a:bodyPr>
-            <a:lstStyle/>
-            <a:p>
-              <a:pPr algn="l">
-                <a:lnSpc>
-                  <a:spcPct val="115000"/>
-                </a:lnSpc>
-              </a:pPr>
-              <a:r>
-                <a:rPr sz="1100" b="0">
-                  <a:solidFill>
-                    <a:srgbClr val="6E737D"/>
-                  </a:solidFill>
-                  <a:latin typeface="맑은 고딕"/>
-                </a:rPr>
-                <a:t>{{DESC_2}}</a:t>
-              </a:r>
-            </a:p>
-          </p:txBody>
-        </p:sp>
-      </p:grpSp>
-      <p:grpSp>
-        <p:nvGrpSpPr>
-          <p:cNvPr id="23" name="GROUP_CARD_3"/>
-          <p:cNvGrpSpPr/>
-          <p:nvPr/>
-        </p:nvGrpSpPr>
-        <p:grpSpPr>
-          <a:xfrm>
-            <a:off x="5040000" y="972000"/>
-            <a:ext cx="2088000" cy="9288000"/>
-            <a:chOff x="5040000" y="972000"/>
-            <a:chExt cx="2088000" cy="9288000"/>
-          </a:xfrm>
-        </p:grpSpPr>
-        <p:sp>
-          <p:nvSpPr>
-            <p:cNvPr id="18" name="Rectangle 17"/>
-            <p:cNvSpPr/>
-            <p:nvPr/>
-          </p:nvSpPr>
-          <p:spPr>
-            <a:xfrm>
-              <a:off x="5040000" y="972000"/>
-              <a:ext cx="2088000" cy="9288000"/>
-            </a:xfrm>
-            <a:prstGeom prst="rect">
-              <a:avLst/>
-            </a:prstGeom>
-            <a:solidFill>
-              <a:srgbClr val="F1F2F5"/>
-            </a:solidFill>
-            <a:ln>
-              <a:noFill/>
-            </a:ln>
-            <a:effectLst/>
-          </p:spPr>
-          <p:style>
-            <a:lnRef idx="1">
-              <a:schemeClr val="accent1"/>
-            </a:lnRef>
-            <a:fillRef idx="3">
-              <a:schemeClr val="accent1"/>
-            </a:fillRef>
-            <a:effectRef idx="2">
-              <a:schemeClr val="accent1"/>
-            </a:effectRef>
-            <a:fontRef idx="minor">
-              <a:schemeClr val="lt1"/>
-            </a:fontRef>
-          </p:style>
-          <p:txBody>
-            <a:bodyPr rtlCol="0" anchor="ctr"/>
-            <a:lstStyle/>
-            <a:p>
-              <a:pPr algn="ctr"/>
-            </a:p>
-          </p:txBody>
-        </p:sp>
-        <p:sp>
-          <p:nvSpPr>
-            <p:cNvPr id="19" name="Rectangle 18"/>
-            <p:cNvSpPr/>
-            <p:nvPr/>
-          </p:nvSpPr>
-          <p:spPr>
-            <a:xfrm>
-              <a:off x="5040000" y="972000"/>
-              <a:ext cx="2088000" cy="72000"/>
-            </a:xfrm>
-            <a:prstGeom prst="rect">
-              <a:avLst/>
-            </a:prstGeom>
-            <a:solidFill>
-              <a:srgbClr val="B08D57"/>
-            </a:solidFill>
-            <a:ln>
-              <a:noFill/>
-            </a:ln>
-            <a:effectLst/>
-          </p:spPr>
-          <p:style>
-            <a:lnRef idx="1">
-              <a:schemeClr val="accent1"/>
-            </a:lnRef>
-            <a:fillRef idx="3">
-              <a:schemeClr val="accent1"/>
-            </a:fillRef>
-            <a:effectRef idx="2">
-              <a:schemeClr val="accent1"/>
-            </a:effectRef>
-            <a:fontRef idx="minor">
-              <a:schemeClr val="lt1"/>
-            </a:fontRef>
-          </p:style>
-          <p:txBody>
-            <a:bodyPr rtlCol="0" anchor="ctr"/>
-            <a:lstStyle/>
-            <a:p>
-              <a:pPr algn="ctr"/>
-            </a:p>
-          </p:txBody>
-        </p:sp>
-        <p:sp>
-          <p:nvSpPr>
-            <p:cNvPr id="20" name="PHOTO_3"/>
-            <p:cNvSpPr/>
-            <p:nvPr/>
-          </p:nvSpPr>
-          <p:spPr>
-            <a:xfrm>
-              <a:off x="5184000" y="1116000"/>
-              <a:ext cx="1800000" cy="7920000"/>
-            </a:xfrm>
-            <a:prstGeom prst="rect">
-              <a:avLst/>
-            </a:prstGeom>
-            <a:solidFill>
-              <a:srgbClr val="F1F2F5"/>
-            </a:solidFill>
-            <a:ln>
-              <a:noFill/>
-            </a:ln>
-            <a:effectLst/>
-          </p:spPr>
-          <p:style>
-            <a:lnRef idx="1">
-              <a:schemeClr val="accent1"/>
-            </a:lnRef>
-            <a:fillRef idx="3">
-              <a:schemeClr val="accent1"/>
-            </a:fillRef>
-            <a:effectRef idx="2">
-              <a:schemeClr val="accent1"/>
-            </a:effectRef>
-            <a:fontRef idx="minor">
-              <a:schemeClr val="lt1"/>
-            </a:fontRef>
-          </p:style>
-          <p:txBody>
-            <a:bodyPr rtlCol="0" anchor="ctr"/>
-            <a:lstStyle/>
-            <a:p>
-              <a:pPr algn="ctr"/>
-            </a:p>
-          </p:txBody>
-        </p:sp>
-        <p:sp>
-          <p:nvSpPr>
-            <p:cNvPr id="21" name="TextBox 20"/>
-            <p:cNvSpPr txBox="1"/>
-            <p:nvPr/>
-          </p:nvSpPr>
-          <p:spPr>
-            <a:xfrm>
-              <a:off x="5184000" y="9036000"/>
-              <a:ext cx="1800000" cy="504000"/>
+              <a:off x="5040000" y="6660000"/>
+              <a:ext cx="2088000" cy="324000"/>
             </a:xfrm>
             <a:prstGeom prst="rect">
               <a:avLst/>
@@ -3899,14 +3684,14 @@
         </p:sp>
         <p:sp>
           <p:nvSpPr>
-            <p:cNvPr id="22" name="TextBox 21"/>
+            <p:cNvPr id="17" name="TextBox 16"/>
             <p:cNvSpPr txBox="1"/>
             <p:nvPr/>
           </p:nvSpPr>
           <p:spPr>
             <a:xfrm>
-              <a:off x="5184000" y="9540000"/>
-              <a:ext cx="1800000" cy="576000"/>
+              <a:off x="5040000" y="7020000"/>
+              <a:ext cx="2088000" cy="1656000"/>
             </a:xfrm>
             <a:prstGeom prst="rect">
               <a:avLst/>
@@ -3927,7 +3712,7 @@
               <a:r>
                 <a:rPr sz="1100" b="0">
                   <a:solidFill>
-                    <a:srgbClr val="6E737D"/>
+                    <a:srgbClr val="373C46"/>
                   </a:solidFill>
                   <a:latin typeface="맑은 고딕"/>
                 </a:rPr>

--- a/templates/feature/feature_3card_A.pptx
+++ b/templates/feature/feature_3card_A.pptx
@@ -3098,7 +3098,97 @@
       <p:grpSpPr/>
       <p:sp>
         <p:nvSpPr>
-          <p:cNvPr id="2" name="TextBox 1"/>
+          <p:cNvPr id="2" name="Rectangle 1"/>
+          <p:cNvSpPr/>
+          <p:nvPr/>
+        </p:nvSpPr>
+        <p:spPr>
+          <a:xfrm>
+            <a:off x="0" y="0"/>
+            <a:ext cx="7560000" cy="10692000"/>
+          </a:xfrm>
+          <a:prstGeom prst="rect">
+            <a:avLst/>
+          </a:prstGeom>
+          <a:solidFill>
+            <a:srgbClr val="FAF8F4"/>
+          </a:solidFill>
+          <a:ln>
+            <a:noFill/>
+          </a:ln>
+          <a:effectLst/>
+        </p:spPr>
+        <p:style>
+          <a:lnRef idx="1">
+            <a:schemeClr val="accent1"/>
+          </a:lnRef>
+          <a:fillRef idx="3">
+            <a:schemeClr val="accent1"/>
+          </a:fillRef>
+          <a:effectRef idx="2">
+            <a:schemeClr val="accent1"/>
+          </a:effectRef>
+          <a:fontRef idx="minor">
+            <a:schemeClr val="lt1"/>
+          </a:fontRef>
+        </p:style>
+        <p:txBody>
+          <a:bodyPr rtlCol="0" anchor="ctr"/>
+          <a:lstStyle/>
+          <a:p>
+            <a:pPr algn="ctr"/>
+          </a:p>
+        </p:txBody>
+      </p:sp>
+      <p:sp>
+        <p:nvSpPr>
+          <p:cNvPr id="3" name="Oval 2"/>
+          <p:cNvSpPr/>
+          <p:nvPr/>
+        </p:nvSpPr>
+        <p:spPr>
+          <a:xfrm>
+            <a:off x="-4680000" y="8172000"/>
+            <a:ext cx="7560000" cy="7560000"/>
+          </a:xfrm>
+          <a:prstGeom prst="ellipse">
+            <a:avLst/>
+          </a:prstGeom>
+          <a:solidFill>
+            <a:srgbClr val="C4B28C">
+              <a:alpha val="5000"/>
+            </a:srgbClr>
+          </a:solidFill>
+          <a:ln>
+            <a:noFill/>
+          </a:ln>
+          <a:effectLst/>
+        </p:spPr>
+        <p:style>
+          <a:lnRef idx="1">
+            <a:schemeClr val="accent1"/>
+          </a:lnRef>
+          <a:fillRef idx="3">
+            <a:schemeClr val="accent1"/>
+          </a:fillRef>
+          <a:effectRef idx="2">
+            <a:schemeClr val="accent1"/>
+          </a:effectRef>
+          <a:fontRef idx="minor">
+            <a:schemeClr val="lt1"/>
+          </a:fontRef>
+        </p:style>
+        <p:txBody>
+          <a:bodyPr rtlCol="0" anchor="ctr"/>
+          <a:lstStyle/>
+          <a:p>
+            <a:pPr algn="ctr"/>
+          </a:p>
+        </p:txBody>
+      </p:sp>
+      <p:sp>
+        <p:nvSpPr>
+          <p:cNvPr id="4" name="TextBox 3"/>
           <p:cNvSpPr txBox="1"/>
           <p:nvPr/>
         </p:nvSpPr>
@@ -3137,7 +3227,7 @@
       </p:sp>
       <p:sp>
         <p:nvSpPr>
-          <p:cNvPr id="3" name="Rectangle 2"/>
+          <p:cNvPr id="5" name="Rectangle 4"/>
           <p:cNvSpPr/>
           <p:nvPr/>
         </p:nvSpPr>
@@ -3181,7 +3271,7 @@
       </p:sp>
       <p:grpSp>
         <p:nvGrpSpPr>
-          <p:cNvPr id="8" name="GROUP_CARD_1"/>
+          <p:cNvPr id="10" name="GROUP_CARD_1"/>
           <p:cNvGrpSpPr/>
           <p:nvPr/>
         </p:nvGrpSpPr>
@@ -3195,7 +3285,7 @@
         </p:grpSpPr>
         <p:sp>
           <p:nvSpPr>
-            <p:cNvPr id="4" name="PHOTO_1"/>
+            <p:cNvPr id="6" name="PHOTO_1"/>
             <p:cNvSpPr/>
             <p:nvPr/>
           </p:nvSpPr>
@@ -3239,7 +3329,7 @@
         </p:sp>
         <p:sp>
           <p:nvSpPr>
-            <p:cNvPr id="5" name="Rectangle 4"/>
+            <p:cNvPr id="7" name="Rectangle 6"/>
             <p:cNvSpPr/>
             <p:nvPr/>
           </p:nvSpPr>
@@ -3283,7 +3373,7 @@
         </p:sp>
         <p:sp>
           <p:nvSpPr>
-            <p:cNvPr id="6" name="TextBox 5"/>
+            <p:cNvPr id="8" name="TextBox 7"/>
             <p:cNvSpPr txBox="1"/>
             <p:nvPr/>
           </p:nvSpPr>
@@ -3322,7 +3412,7 @@
         </p:sp>
         <p:sp>
           <p:nvSpPr>
-            <p:cNvPr id="7" name="TextBox 6"/>
+            <p:cNvPr id="9" name="TextBox 8"/>
             <p:cNvSpPr txBox="1"/>
             <p:nvPr/>
           </p:nvSpPr>
@@ -3362,7 +3452,7 @@
       </p:grpSp>
       <p:grpSp>
         <p:nvGrpSpPr>
-          <p:cNvPr id="13" name="GROUP_CARD_2"/>
+          <p:cNvPr id="15" name="GROUP_CARD_2"/>
           <p:cNvGrpSpPr/>
           <p:nvPr/>
         </p:nvGrpSpPr>
@@ -3376,7 +3466,7 @@
         </p:grpSpPr>
         <p:sp>
           <p:nvSpPr>
-            <p:cNvPr id="9" name="PHOTO_2"/>
+            <p:cNvPr id="11" name="PHOTO_2"/>
             <p:cNvSpPr/>
             <p:nvPr/>
           </p:nvSpPr>
@@ -3420,7 +3510,7 @@
         </p:sp>
         <p:sp>
           <p:nvSpPr>
-            <p:cNvPr id="10" name="Rectangle 9"/>
+            <p:cNvPr id="12" name="Rectangle 11"/>
             <p:cNvSpPr/>
             <p:nvPr/>
           </p:nvSpPr>
@@ -3464,7 +3554,7 @@
         </p:sp>
         <p:sp>
           <p:nvSpPr>
-            <p:cNvPr id="11" name="TextBox 10"/>
+            <p:cNvPr id="13" name="TextBox 12"/>
             <p:cNvSpPr txBox="1"/>
             <p:nvPr/>
           </p:nvSpPr>
@@ -3503,7 +3593,7 @@
         </p:sp>
         <p:sp>
           <p:nvSpPr>
-            <p:cNvPr id="12" name="TextBox 11"/>
+            <p:cNvPr id="14" name="TextBox 13"/>
             <p:cNvSpPr txBox="1"/>
             <p:nvPr/>
           </p:nvSpPr>
@@ -3543,7 +3633,7 @@
       </p:grpSp>
       <p:grpSp>
         <p:nvGrpSpPr>
-          <p:cNvPr id="18" name="GROUP_CARD_3"/>
+          <p:cNvPr id="20" name="GROUP_CARD_3"/>
           <p:cNvGrpSpPr/>
           <p:nvPr/>
         </p:nvGrpSpPr>
@@ -3557,7 +3647,7 @@
         </p:grpSpPr>
         <p:sp>
           <p:nvSpPr>
-            <p:cNvPr id="14" name="PHOTO_3"/>
+            <p:cNvPr id="16" name="PHOTO_3"/>
             <p:cNvSpPr/>
             <p:nvPr/>
           </p:nvSpPr>
@@ -3601,7 +3691,7 @@
         </p:sp>
         <p:sp>
           <p:nvSpPr>
-            <p:cNvPr id="15" name="Rectangle 14"/>
+            <p:cNvPr id="17" name="Rectangle 16"/>
             <p:cNvSpPr/>
             <p:nvPr/>
           </p:nvSpPr>
@@ -3645,7 +3735,7 @@
         </p:sp>
         <p:sp>
           <p:nvSpPr>
-            <p:cNvPr id="16" name="TextBox 15"/>
+            <p:cNvPr id="18" name="TextBox 17"/>
             <p:cNvSpPr txBox="1"/>
             <p:nvPr/>
           </p:nvSpPr>
@@ -3684,7 +3774,7 @@
         </p:sp>
         <p:sp>
           <p:nvSpPr>
-            <p:cNvPr id="17" name="TextBox 16"/>
+            <p:cNvPr id="19" name="TextBox 18"/>
             <p:cNvSpPr txBox="1"/>
             <p:nvPr/>
           </p:nvSpPr>
